--- a/public/fun/cards/teacher/teacher-30.pptx
+++ b/public/fun/cards/teacher/teacher-30.pptx
@@ -3085,7 +3085,7 @@
     <p:bg>
       <p:bgPr>
         <a:solidFill>
-          <a:srgbClr val="A72A3F"/>
+          <a:srgbClr val="F3F4F6"/>
         </a:solidFill>
         <a:effectLst/>
       </p:bgPr>
@@ -3099,692 +3099,14 @@
       <p:grpSpPr/>
       <p:sp>
         <p:nvSpPr>
-          <p:cNvPr id="2" name="Oval 1"/>
-          <p:cNvSpPr/>
+          <p:cNvPr id="2" name="텍스트"/>
+          <p:cNvSpPr txBox="1"/>
           <p:nvPr/>
         </p:nvSpPr>
         <p:spPr>
           <a:xfrm>
-            <a:off x="2462400" y="158400"/>
-            <a:ext cx="43200" cy="43200"/>
-          </a:xfrm>
-          <a:prstGeom prst="ellipse">
-            <a:avLst/>
-          </a:prstGeom>
-          <a:solidFill>
-            <a:srgbClr val="F4CDD3">
-              <a:alpha val="70000"/>
-            </a:srgbClr>
-          </a:solidFill>
-          <a:ln>
-            <a:noFill/>
-          </a:ln>
-        </p:spPr>
-        <p:txBody>
-          <a:bodyPr rtlCol="0" anchor="ctr"/>
-          <a:lstStyle/>
-          <a:p>
-            <a:pPr algn="ctr"/>
-          </a:p>
-        </p:txBody>
-      </p:sp>
-      <p:sp>
-        <p:nvSpPr>
-          <p:cNvPr id="3" name="Oval 2"/>
-          <p:cNvSpPr/>
-          <p:nvPr/>
-        </p:nvSpPr>
-        <p:spPr>
-          <a:xfrm>
-            <a:off x="2462400" y="266400"/>
-            <a:ext cx="43200" cy="43200"/>
-          </a:xfrm>
-          <a:prstGeom prst="ellipse">
-            <a:avLst/>
-          </a:prstGeom>
-          <a:solidFill>
-            <a:srgbClr val="F4CDD3">
-              <a:alpha val="57999"/>
-            </a:srgbClr>
-          </a:solidFill>
-          <a:ln>
-            <a:noFill/>
-          </a:ln>
-        </p:spPr>
-        <p:txBody>
-          <a:bodyPr rtlCol="0" anchor="ctr"/>
-          <a:lstStyle/>
-          <a:p>
-            <a:pPr algn="ctr"/>
-          </a:p>
-        </p:txBody>
-      </p:sp>
-      <p:sp>
-        <p:nvSpPr>
-          <p:cNvPr id="4" name="Oval 3"/>
-          <p:cNvSpPr/>
-          <p:nvPr/>
-        </p:nvSpPr>
-        <p:spPr>
-          <a:xfrm>
-            <a:off x="2462400" y="374400"/>
-            <a:ext cx="43200" cy="43200"/>
-          </a:xfrm>
-          <a:prstGeom prst="ellipse">
-            <a:avLst/>
-          </a:prstGeom>
-          <a:solidFill>
-            <a:srgbClr val="F4CDD3">
-              <a:alpha val="46000"/>
-            </a:srgbClr>
-          </a:solidFill>
-          <a:ln>
-            <a:noFill/>
-          </a:ln>
-        </p:spPr>
-        <p:txBody>
-          <a:bodyPr rtlCol="0" anchor="ctr"/>
-          <a:lstStyle/>
-          <a:p>
-            <a:pPr algn="ctr"/>
-          </a:p>
-        </p:txBody>
-      </p:sp>
-      <p:sp>
-        <p:nvSpPr>
-          <p:cNvPr id="5" name="Oval 4"/>
-          <p:cNvSpPr/>
-          <p:nvPr/>
-        </p:nvSpPr>
-        <p:spPr>
-          <a:xfrm>
-            <a:off x="2462400" y="482400"/>
-            <a:ext cx="43200" cy="43200"/>
-          </a:xfrm>
-          <a:prstGeom prst="ellipse">
-            <a:avLst/>
-          </a:prstGeom>
-          <a:solidFill>
-            <a:srgbClr val="F4CDD3">
-              <a:alpha val="34000"/>
-            </a:srgbClr>
-          </a:solidFill>
-          <a:ln>
-            <a:noFill/>
-          </a:ln>
-        </p:spPr>
-        <p:txBody>
-          <a:bodyPr rtlCol="0" anchor="ctr"/>
-          <a:lstStyle/>
-          <a:p>
-            <a:pPr algn="ctr"/>
-          </a:p>
-        </p:txBody>
-      </p:sp>
-      <p:sp>
-        <p:nvSpPr>
-          <p:cNvPr id="6" name="Oval 5"/>
-          <p:cNvSpPr/>
-          <p:nvPr/>
-        </p:nvSpPr>
-        <p:spPr>
-          <a:xfrm>
-            <a:off x="2570400" y="158400"/>
-            <a:ext cx="43200" cy="43200"/>
-          </a:xfrm>
-          <a:prstGeom prst="ellipse">
-            <a:avLst/>
-          </a:prstGeom>
-          <a:solidFill>
-            <a:srgbClr val="F4CDD3">
-              <a:alpha val="70000"/>
-            </a:srgbClr>
-          </a:solidFill>
-          <a:ln>
-            <a:noFill/>
-          </a:ln>
-        </p:spPr>
-        <p:txBody>
-          <a:bodyPr rtlCol="0" anchor="ctr"/>
-          <a:lstStyle/>
-          <a:p>
-            <a:pPr algn="ctr"/>
-          </a:p>
-        </p:txBody>
-      </p:sp>
-      <p:sp>
-        <p:nvSpPr>
-          <p:cNvPr id="7" name="Oval 6"/>
-          <p:cNvSpPr/>
-          <p:nvPr/>
-        </p:nvSpPr>
-        <p:spPr>
-          <a:xfrm>
-            <a:off x="2570400" y="266400"/>
-            <a:ext cx="43200" cy="43200"/>
-          </a:xfrm>
-          <a:prstGeom prst="ellipse">
-            <a:avLst/>
-          </a:prstGeom>
-          <a:solidFill>
-            <a:srgbClr val="F4CDD3">
-              <a:alpha val="57999"/>
-            </a:srgbClr>
-          </a:solidFill>
-          <a:ln>
-            <a:noFill/>
-          </a:ln>
-        </p:spPr>
-        <p:txBody>
-          <a:bodyPr rtlCol="0" anchor="ctr"/>
-          <a:lstStyle/>
-          <a:p>
-            <a:pPr algn="ctr"/>
-          </a:p>
-        </p:txBody>
-      </p:sp>
-      <p:sp>
-        <p:nvSpPr>
-          <p:cNvPr id="8" name="Oval 7"/>
-          <p:cNvSpPr/>
-          <p:nvPr/>
-        </p:nvSpPr>
-        <p:spPr>
-          <a:xfrm>
-            <a:off x="2570400" y="374400"/>
-            <a:ext cx="43200" cy="43200"/>
-          </a:xfrm>
-          <a:prstGeom prst="ellipse">
-            <a:avLst/>
-          </a:prstGeom>
-          <a:solidFill>
-            <a:srgbClr val="F4CDD3">
-              <a:alpha val="46000"/>
-            </a:srgbClr>
-          </a:solidFill>
-          <a:ln>
-            <a:noFill/>
-          </a:ln>
-        </p:spPr>
-        <p:txBody>
-          <a:bodyPr rtlCol="0" anchor="ctr"/>
-          <a:lstStyle/>
-          <a:p>
-            <a:pPr algn="ctr"/>
-          </a:p>
-        </p:txBody>
-      </p:sp>
-      <p:sp>
-        <p:nvSpPr>
-          <p:cNvPr id="9" name="Oval 8"/>
-          <p:cNvSpPr/>
-          <p:nvPr/>
-        </p:nvSpPr>
-        <p:spPr>
-          <a:xfrm>
-            <a:off x="2570400" y="482400"/>
-            <a:ext cx="43200" cy="43200"/>
-          </a:xfrm>
-          <a:prstGeom prst="ellipse">
-            <a:avLst/>
-          </a:prstGeom>
-          <a:solidFill>
-            <a:srgbClr val="F4CDD3">
-              <a:alpha val="34000"/>
-            </a:srgbClr>
-          </a:solidFill>
-          <a:ln>
-            <a:noFill/>
-          </a:ln>
-        </p:spPr>
-        <p:txBody>
-          <a:bodyPr rtlCol="0" anchor="ctr"/>
-          <a:lstStyle/>
-          <a:p>
-            <a:pPr algn="ctr"/>
-          </a:p>
-        </p:txBody>
-      </p:sp>
-      <p:sp>
-        <p:nvSpPr>
-          <p:cNvPr id="10" name="Oval 9"/>
-          <p:cNvSpPr/>
-          <p:nvPr/>
-        </p:nvSpPr>
-        <p:spPr>
-          <a:xfrm>
-            <a:off x="2678400" y="158400"/>
-            <a:ext cx="43200" cy="43200"/>
-          </a:xfrm>
-          <a:prstGeom prst="ellipse">
-            <a:avLst/>
-          </a:prstGeom>
-          <a:solidFill>
-            <a:srgbClr val="F4CDD3">
-              <a:alpha val="70000"/>
-            </a:srgbClr>
-          </a:solidFill>
-          <a:ln>
-            <a:noFill/>
-          </a:ln>
-        </p:spPr>
-        <p:txBody>
-          <a:bodyPr rtlCol="0" anchor="ctr"/>
-          <a:lstStyle/>
-          <a:p>
-            <a:pPr algn="ctr"/>
-          </a:p>
-        </p:txBody>
-      </p:sp>
-      <p:sp>
-        <p:nvSpPr>
-          <p:cNvPr id="11" name="Oval 10"/>
-          <p:cNvSpPr/>
-          <p:nvPr/>
-        </p:nvSpPr>
-        <p:spPr>
-          <a:xfrm>
-            <a:off x="2678400" y="266400"/>
-            <a:ext cx="43200" cy="43200"/>
-          </a:xfrm>
-          <a:prstGeom prst="ellipse">
-            <a:avLst/>
-          </a:prstGeom>
-          <a:solidFill>
-            <a:srgbClr val="F4CDD3">
-              <a:alpha val="57999"/>
-            </a:srgbClr>
-          </a:solidFill>
-          <a:ln>
-            <a:noFill/>
-          </a:ln>
-        </p:spPr>
-        <p:txBody>
-          <a:bodyPr rtlCol="0" anchor="ctr"/>
-          <a:lstStyle/>
-          <a:p>
-            <a:pPr algn="ctr"/>
-          </a:p>
-        </p:txBody>
-      </p:sp>
-      <p:sp>
-        <p:nvSpPr>
-          <p:cNvPr id="12" name="Oval 11"/>
-          <p:cNvSpPr/>
-          <p:nvPr/>
-        </p:nvSpPr>
-        <p:spPr>
-          <a:xfrm>
-            <a:off x="2678400" y="374400"/>
-            <a:ext cx="43200" cy="43200"/>
-          </a:xfrm>
-          <a:prstGeom prst="ellipse">
-            <a:avLst/>
-          </a:prstGeom>
-          <a:solidFill>
-            <a:srgbClr val="F4CDD3">
-              <a:alpha val="46000"/>
-            </a:srgbClr>
-          </a:solidFill>
-          <a:ln>
-            <a:noFill/>
-          </a:ln>
-        </p:spPr>
-        <p:txBody>
-          <a:bodyPr rtlCol="0" anchor="ctr"/>
-          <a:lstStyle/>
-          <a:p>
-            <a:pPr algn="ctr"/>
-          </a:p>
-        </p:txBody>
-      </p:sp>
-      <p:sp>
-        <p:nvSpPr>
-          <p:cNvPr id="13" name="Oval 12"/>
-          <p:cNvSpPr/>
-          <p:nvPr/>
-        </p:nvSpPr>
-        <p:spPr>
-          <a:xfrm>
-            <a:off x="2678400" y="482400"/>
-            <a:ext cx="43200" cy="43200"/>
-          </a:xfrm>
-          <a:prstGeom prst="ellipse">
-            <a:avLst/>
-          </a:prstGeom>
-          <a:solidFill>
-            <a:srgbClr val="F4CDD3">
-              <a:alpha val="34000"/>
-            </a:srgbClr>
-          </a:solidFill>
-          <a:ln>
-            <a:noFill/>
-          </a:ln>
-        </p:spPr>
-        <p:txBody>
-          <a:bodyPr rtlCol="0" anchor="ctr"/>
-          <a:lstStyle/>
-          <a:p>
-            <a:pPr algn="ctr"/>
-          </a:p>
-        </p:txBody>
-      </p:sp>
-      <p:sp>
-        <p:nvSpPr>
-          <p:cNvPr id="14" name="Oval 13"/>
-          <p:cNvSpPr/>
-          <p:nvPr/>
-        </p:nvSpPr>
-        <p:spPr>
-          <a:xfrm>
-            <a:off x="2786400" y="158400"/>
-            <a:ext cx="43200" cy="43200"/>
-          </a:xfrm>
-          <a:prstGeom prst="ellipse">
-            <a:avLst/>
-          </a:prstGeom>
-          <a:solidFill>
-            <a:srgbClr val="F4CDD3">
-              <a:alpha val="70000"/>
-            </a:srgbClr>
-          </a:solidFill>
-          <a:ln>
-            <a:noFill/>
-          </a:ln>
-        </p:spPr>
-        <p:txBody>
-          <a:bodyPr rtlCol="0" anchor="ctr"/>
-          <a:lstStyle/>
-          <a:p>
-            <a:pPr algn="ctr"/>
-          </a:p>
-        </p:txBody>
-      </p:sp>
-      <p:sp>
-        <p:nvSpPr>
-          <p:cNvPr id="15" name="Oval 14"/>
-          <p:cNvSpPr/>
-          <p:nvPr/>
-        </p:nvSpPr>
-        <p:spPr>
-          <a:xfrm>
-            <a:off x="2786400" y="266400"/>
-            <a:ext cx="43200" cy="43200"/>
-          </a:xfrm>
-          <a:prstGeom prst="ellipse">
-            <a:avLst/>
-          </a:prstGeom>
-          <a:solidFill>
-            <a:srgbClr val="F4CDD3">
-              <a:alpha val="57999"/>
-            </a:srgbClr>
-          </a:solidFill>
-          <a:ln>
-            <a:noFill/>
-          </a:ln>
-        </p:spPr>
-        <p:txBody>
-          <a:bodyPr rtlCol="0" anchor="ctr"/>
-          <a:lstStyle/>
-          <a:p>
-            <a:pPr algn="ctr"/>
-          </a:p>
-        </p:txBody>
-      </p:sp>
-      <p:sp>
-        <p:nvSpPr>
-          <p:cNvPr id="16" name="Oval 15"/>
-          <p:cNvSpPr/>
-          <p:nvPr/>
-        </p:nvSpPr>
-        <p:spPr>
-          <a:xfrm>
-            <a:off x="2786400" y="374400"/>
-            <a:ext cx="43200" cy="43200"/>
-          </a:xfrm>
-          <a:prstGeom prst="ellipse">
-            <a:avLst/>
-          </a:prstGeom>
-          <a:solidFill>
-            <a:srgbClr val="F4CDD3">
-              <a:alpha val="46000"/>
-            </a:srgbClr>
-          </a:solidFill>
-          <a:ln>
-            <a:noFill/>
-          </a:ln>
-        </p:spPr>
-        <p:txBody>
-          <a:bodyPr rtlCol="0" anchor="ctr"/>
-          <a:lstStyle/>
-          <a:p>
-            <a:pPr algn="ctr"/>
-          </a:p>
-        </p:txBody>
-      </p:sp>
-      <p:sp>
-        <p:nvSpPr>
-          <p:cNvPr id="17" name="Oval 16"/>
-          <p:cNvSpPr/>
-          <p:nvPr/>
-        </p:nvSpPr>
-        <p:spPr>
-          <a:xfrm>
-            <a:off x="2786400" y="482400"/>
-            <a:ext cx="43200" cy="43200"/>
-          </a:xfrm>
-          <a:prstGeom prst="ellipse">
-            <a:avLst/>
-          </a:prstGeom>
-          <a:solidFill>
-            <a:srgbClr val="F4CDD3">
-              <a:alpha val="34000"/>
-            </a:srgbClr>
-          </a:solidFill>
-          <a:ln>
-            <a:noFill/>
-          </a:ln>
-        </p:spPr>
-        <p:txBody>
-          <a:bodyPr rtlCol="0" anchor="ctr"/>
-          <a:lstStyle/>
-          <a:p>
-            <a:pPr algn="ctr"/>
-          </a:p>
-        </p:txBody>
-      </p:sp>
-      <p:sp>
-        <p:nvSpPr>
-          <p:cNvPr id="18" name="Oval 17"/>
-          <p:cNvSpPr/>
-          <p:nvPr/>
-        </p:nvSpPr>
-        <p:spPr>
-          <a:xfrm>
-            <a:off x="2894400" y="158400"/>
-            <a:ext cx="43200" cy="43200"/>
-          </a:xfrm>
-          <a:prstGeom prst="ellipse">
-            <a:avLst/>
-          </a:prstGeom>
-          <a:solidFill>
-            <a:srgbClr val="F4CDD3">
-              <a:alpha val="70000"/>
-            </a:srgbClr>
-          </a:solidFill>
-          <a:ln>
-            <a:noFill/>
-          </a:ln>
-        </p:spPr>
-        <p:txBody>
-          <a:bodyPr rtlCol="0" anchor="ctr"/>
-          <a:lstStyle/>
-          <a:p>
-            <a:pPr algn="ctr"/>
-          </a:p>
-        </p:txBody>
-      </p:sp>
-      <p:sp>
-        <p:nvSpPr>
-          <p:cNvPr id="19" name="Oval 18"/>
-          <p:cNvSpPr/>
-          <p:nvPr/>
-        </p:nvSpPr>
-        <p:spPr>
-          <a:xfrm>
-            <a:off x="2894400" y="266400"/>
-            <a:ext cx="43200" cy="43200"/>
-          </a:xfrm>
-          <a:prstGeom prst="ellipse">
-            <a:avLst/>
-          </a:prstGeom>
-          <a:solidFill>
-            <a:srgbClr val="F4CDD3">
-              <a:alpha val="57999"/>
-            </a:srgbClr>
-          </a:solidFill>
-          <a:ln>
-            <a:noFill/>
-          </a:ln>
-        </p:spPr>
-        <p:txBody>
-          <a:bodyPr rtlCol="0" anchor="ctr"/>
-          <a:lstStyle/>
-          <a:p>
-            <a:pPr algn="ctr"/>
-          </a:p>
-        </p:txBody>
-      </p:sp>
-      <p:sp>
-        <p:nvSpPr>
-          <p:cNvPr id="20" name="Oval 19"/>
-          <p:cNvSpPr/>
-          <p:nvPr/>
-        </p:nvSpPr>
-        <p:spPr>
-          <a:xfrm>
-            <a:off x="2894400" y="374400"/>
-            <a:ext cx="43200" cy="43200"/>
-          </a:xfrm>
-          <a:prstGeom prst="ellipse">
-            <a:avLst/>
-          </a:prstGeom>
-          <a:solidFill>
-            <a:srgbClr val="F4CDD3">
-              <a:alpha val="46000"/>
-            </a:srgbClr>
-          </a:solidFill>
-          <a:ln>
-            <a:noFill/>
-          </a:ln>
-        </p:spPr>
-        <p:txBody>
-          <a:bodyPr rtlCol="0" anchor="ctr"/>
-          <a:lstStyle/>
-          <a:p>
-            <a:pPr algn="ctr"/>
-          </a:p>
-        </p:txBody>
-      </p:sp>
-      <p:sp>
-        <p:nvSpPr>
-          <p:cNvPr id="21" name="Oval 20"/>
-          <p:cNvSpPr/>
-          <p:nvPr/>
-        </p:nvSpPr>
-        <p:spPr>
-          <a:xfrm>
-            <a:off x="2894400" y="482400"/>
-            <a:ext cx="43200" cy="43200"/>
-          </a:xfrm>
-          <a:prstGeom prst="ellipse">
-            <a:avLst/>
-          </a:prstGeom>
-          <a:solidFill>
-            <a:srgbClr val="F4CDD3">
-              <a:alpha val="34000"/>
-            </a:srgbClr>
-          </a:solidFill>
-          <a:ln>
-            <a:noFill/>
-          </a:ln>
-        </p:spPr>
-        <p:txBody>
-          <a:bodyPr rtlCol="0" anchor="ctr"/>
-          <a:lstStyle/>
-          <a:p>
-            <a:pPr algn="ctr"/>
-          </a:p>
-        </p:txBody>
-      </p:sp>
-      <p:sp>
-        <p:nvSpPr>
-          <p:cNvPr id="22" name="Rectangle 21"/>
-          <p:cNvSpPr/>
-          <p:nvPr/>
-        </p:nvSpPr>
-        <p:spPr>
-          <a:xfrm>
-            <a:off x="0" y="1663200"/>
-            <a:ext cx="3240000" cy="136800"/>
-          </a:xfrm>
-          <a:prstGeom prst="rect">
-            <a:avLst/>
-          </a:prstGeom>
-          <a:solidFill>
-            <a:srgbClr val="F4CDD3"/>
-          </a:solidFill>
-          <a:ln>
-            <a:noFill/>
-          </a:ln>
-        </p:spPr>
-        <p:txBody>
-          <a:bodyPr rtlCol="0" anchor="ctr"/>
-          <a:lstStyle/>
-          <a:p>
-            <a:pPr algn="ctr"/>
-          </a:p>
-        </p:txBody>
-      </p:sp>
-      <p:sp>
-        <p:nvSpPr>
-          <p:cNvPr id="23" name="Rectangle 22"/>
-          <p:cNvSpPr/>
-          <p:nvPr/>
-        </p:nvSpPr>
-        <p:spPr>
-          <a:xfrm>
-            <a:off x="0" y="1663200"/>
-            <a:ext cx="936000" cy="136800"/>
-          </a:xfrm>
-          <a:prstGeom prst="rect">
-            <a:avLst/>
-          </a:prstGeom>
-          <a:solidFill>
-            <a:srgbClr val="B54C5E"/>
-          </a:solidFill>
-          <a:ln>
-            <a:noFill/>
-          </a:ln>
-        </p:spPr>
-        <p:txBody>
-          <a:bodyPr rtlCol="0" anchor="ctr"/>
-          <a:lstStyle/>
-          <a:p>
-            <a:pPr algn="ctr"/>
-          </a:p>
-        </p:txBody>
-      </p:sp>
-      <p:sp>
-        <p:nvSpPr>
-          <p:cNvPr id="24" name="텍스트"/>
-          <p:cNvSpPr txBox="1"/>
-          <p:nvPr/>
-        </p:nvSpPr>
-        <p:spPr>
-          <a:xfrm>
-            <a:off x="252000" y="208800"/>
-            <a:ext cx="1800000" cy="100800"/>
+            <a:off x="252000" y="223200"/>
+            <a:ext cx="2016000" cy="133351"/>
           </a:xfrm>
           <a:prstGeom prst="rect">
             <a:avLst/>
@@ -3799,13 +3121,13 @@
           <a:p>
             <a:pPr algn="l">
               <a:lnSpc>
-                <a:spcPts val="1087"/>
+                <a:spcPts val="1015"/>
               </a:lnSpc>
             </a:pPr>
             <a:r>
-              <a:rPr sz="750" b="1" spc="150">
+              <a:rPr sz="700" b="1" spc="200">
                 <a:solidFill>
-                  <a:srgbClr val="E9CBD0"/>
+                  <a:srgbClr val="6B7280"/>
                 </a:solidFill>
                 <a:latin typeface="맑은 고딕"/>
                 <a:ea typeface="맑은 고딕"/>
@@ -3817,14 +3139,14 @@
       </p:sp>
       <p:sp>
         <p:nvSpPr>
-          <p:cNvPr id="25" name="텍스트"/>
+          <p:cNvPr id="3" name="텍스트"/>
           <p:cNvSpPr txBox="1"/>
           <p:nvPr/>
         </p:nvSpPr>
         <p:spPr>
           <a:xfrm>
-            <a:off x="252000" y="540000"/>
-            <a:ext cx="2016000" cy="313692"/>
+            <a:off x="252000" y="468000"/>
+            <a:ext cx="2520000" cy="360000"/>
           </a:xfrm>
           <a:prstGeom prst="rect">
             <a:avLst/>
@@ -3839,13 +3161,13 @@
           <a:p>
             <a:pPr algn="l">
               <a:lnSpc>
-                <a:spcPts val="2755"/>
+                <a:spcPts val="3190"/>
               </a:lnSpc>
             </a:pPr>
             <a:r>
-              <a:rPr sz="1900" b="1" spc="50">
+              <a:rPr sz="2200" b="1">
                 <a:solidFill>
-                  <a:srgbClr val="FFFFFF"/>
+                  <a:srgbClr val="12151C"/>
                 </a:solidFill>
                 <a:latin typeface="맑은 고딕"/>
                 <a:ea typeface="맑은 고딕"/>
@@ -3857,14 +3179,14 @@
       </p:sp>
       <p:sp>
         <p:nvSpPr>
-          <p:cNvPr id="26" name="텍스트"/>
+          <p:cNvPr id="4" name="텍스트"/>
           <p:cNvSpPr txBox="1"/>
           <p:nvPr/>
         </p:nvSpPr>
         <p:spPr>
           <a:xfrm>
-            <a:off x="252000" y="828000"/>
-            <a:ext cx="2016000" cy="122400"/>
+            <a:off x="252000" y="871200"/>
+            <a:ext cx="2520000" cy="171451"/>
           </a:xfrm>
           <a:prstGeom prst="rect">
             <a:avLst/>
@@ -3879,13 +3201,13 @@
           <a:p>
             <a:pPr algn="l">
               <a:lnSpc>
-                <a:spcPts val="1232"/>
+                <a:spcPts val="1305"/>
               </a:lnSpc>
             </a:pPr>
             <a:r>
-              <a:rPr sz="850" b="1">
+              <a:rPr sz="900" b="0">
                 <a:solidFill>
-                  <a:srgbClr val="F4CDD3"/>
+                  <a:srgbClr val="6B7280"/>
                 </a:solidFill>
                 <a:latin typeface="맑은 고딕"/>
                 <a:ea typeface="맑은 고딕"/>
@@ -3897,14 +3219,14 @@
       </p:sp>
       <p:sp>
         <p:nvSpPr>
-          <p:cNvPr id="27" name="텍스트"/>
+          <p:cNvPr id="5" name="텍스트"/>
           <p:cNvSpPr txBox="1"/>
           <p:nvPr/>
         </p:nvSpPr>
         <p:spPr>
           <a:xfrm>
-            <a:off x="252000" y="1108800"/>
-            <a:ext cx="122400" cy="168911"/>
+            <a:off x="252000" y="1216800"/>
+            <a:ext cx="2520000" cy="129541"/>
           </a:xfrm>
           <a:prstGeom prst="rect">
             <a:avLst/>
@@ -3919,32 +3241,61 @@
           <a:p>
             <a:pPr algn="l">
               <a:lnSpc>
-                <a:spcPts val="1015"/>
+                <a:spcPts val="986"/>
               </a:lnSpc>
             </a:pPr>
             <a:r>
-              <a:rPr sz="700" b="1">
+              <a:rPr sz="680" b="0">
                 <a:solidFill>
-                  <a:srgbClr val="F4CDD3"/>
+                  <a:srgbClr val="6B7280"/>
                 </a:solidFill>
                 <a:latin typeface="맑은 고딕"/>
                 <a:ea typeface="맑은 고딕"/>
               </a:rPr>
-              <a:t>T</a:t>
-            </a:r>
-          </a:p>
-        </p:txBody>
-      </p:sp>
-      <p:sp>
-        <p:nvSpPr>
-          <p:cNvPr id="28" name="텍스트"/>
+              <a:t>주소를 입력해 주세요</a:t>
+            </a:r>
+          </a:p>
+        </p:txBody>
+      </p:sp>
+      <p:sp>
+        <p:nvSpPr>
+          <p:cNvPr id="6" name="Rectangle 5"/>
+          <p:cNvSpPr/>
+          <p:nvPr/>
+        </p:nvSpPr>
+        <p:spPr>
+          <a:xfrm>
+            <a:off x="0" y="1476000"/>
+            <a:ext cx="3240000" cy="324000"/>
+          </a:xfrm>
+          <a:prstGeom prst="rect">
+            <a:avLst/>
+          </a:prstGeom>
+          <a:solidFill>
+            <a:srgbClr val="4CD964"/>
+          </a:solidFill>
+          <a:ln>
+            <a:noFill/>
+          </a:ln>
+        </p:spPr>
+        <p:txBody>
+          <a:bodyPr rtlCol="0" anchor="ctr"/>
+          <a:lstStyle/>
+          <a:p>
+            <a:pPr algn="ctr"/>
+          </a:p>
+        </p:txBody>
+      </p:sp>
+      <p:sp>
+        <p:nvSpPr>
+          <p:cNvPr id="7" name="텍스트"/>
           <p:cNvSpPr txBox="1"/>
           <p:nvPr/>
         </p:nvSpPr>
         <p:spPr>
           <a:xfrm>
-            <a:off x="396000" y="1108800"/>
-            <a:ext cx="1584000" cy="168911"/>
+            <a:off x="252000" y="1569600"/>
+            <a:ext cx="1296000" cy="133351"/>
           </a:xfrm>
           <a:prstGeom prst="rect">
             <a:avLst/>
@@ -3963,9 +3314,9 @@
               </a:lnSpc>
             </a:pPr>
             <a:r>
-              <a:rPr sz="700" b="0">
+              <a:rPr sz="700" b="1">
                 <a:solidFill>
-                  <a:srgbClr val="FFFFFF"/>
+                  <a:srgbClr val="12151C"/>
                 </a:solidFill>
                 <a:latin typeface="맑은 고딕"/>
                 <a:ea typeface="맑은 고딕"/>
@@ -3977,14 +3328,14 @@
       </p:sp>
       <p:sp>
         <p:nvSpPr>
-          <p:cNvPr id="29" name="텍스트"/>
+          <p:cNvPr id="8" name="텍스트"/>
           <p:cNvSpPr txBox="1"/>
           <p:nvPr/>
         </p:nvSpPr>
         <p:spPr>
           <a:xfrm>
-            <a:off x="252000" y="1277711"/>
-            <a:ext cx="122400" cy="168911"/>
+            <a:off x="1656000" y="1569600"/>
+            <a:ext cx="1368000" cy="133351"/>
           </a:xfrm>
           <a:prstGeom prst="rect">
             <a:avLst/>
@@ -4005,47 +3356,7 @@
             <a:r>
               <a:rPr sz="700" b="1">
                 <a:solidFill>
-                  <a:srgbClr val="F4CDD3"/>
-                </a:solidFill>
-                <a:latin typeface="맑은 고딕"/>
-                <a:ea typeface="맑은 고딕"/>
-              </a:rPr>
-              <a:t>E</a:t>
-            </a:r>
-          </a:p>
-        </p:txBody>
-      </p:sp>
-      <p:sp>
-        <p:nvSpPr>
-          <p:cNvPr id="30" name="텍스트"/>
-          <p:cNvSpPr txBox="1"/>
-          <p:nvPr/>
-        </p:nvSpPr>
-        <p:spPr>
-          <a:xfrm>
-            <a:off x="396000" y="1277711"/>
-            <a:ext cx="1584000" cy="168911"/>
-          </a:xfrm>
-          <a:prstGeom prst="rect">
-            <a:avLst/>
-          </a:prstGeom>
-          <a:noFill/>
-        </p:spPr>
-        <p:txBody>
-          <a:bodyPr wrap="square" lIns="0" rIns="0" tIns="0" bIns="0" anchor="t">
-            <a:spAutoFit/>
-          </a:bodyPr>
-          <a:lstStyle/>
-          <a:p>
-            <a:pPr algn="l">
-              <a:lnSpc>
-                <a:spcPts val="1015"/>
-              </a:lnSpc>
-            </a:pPr>
-            <a:r>
-              <a:rPr sz="700" b="0">
-                <a:solidFill>
-                  <a:srgbClr val="FFFFFF"/>
+                  <a:srgbClr val="12151C"/>
                 </a:solidFill>
                 <a:latin typeface="맑은 고딕"/>
                 <a:ea typeface="맑은 고딕"/>
@@ -4055,283 +3366,6 @@
           </a:p>
         </p:txBody>
       </p:sp>
-      <p:sp>
-        <p:nvSpPr>
-          <p:cNvPr id="31" name="텍스트"/>
-          <p:cNvSpPr txBox="1"/>
-          <p:nvPr/>
-        </p:nvSpPr>
-        <p:spPr>
-          <a:xfrm>
-            <a:off x="252000" y="1446622"/>
-            <a:ext cx="122400" cy="168911"/>
-          </a:xfrm>
-          <a:prstGeom prst="rect">
-            <a:avLst/>
-          </a:prstGeom>
-          <a:noFill/>
-        </p:spPr>
-        <p:txBody>
-          <a:bodyPr wrap="square" lIns="0" rIns="0" tIns="0" bIns="0" anchor="t">
-            <a:spAutoFit/>
-          </a:bodyPr>
-          <a:lstStyle/>
-          <a:p>
-            <a:pPr algn="l">
-              <a:lnSpc>
-                <a:spcPts val="1015"/>
-              </a:lnSpc>
-            </a:pPr>
-            <a:r>
-              <a:rPr sz="700" b="1">
-                <a:solidFill>
-                  <a:srgbClr val="F4CDD3"/>
-                </a:solidFill>
-                <a:latin typeface="맑은 고딕"/>
-                <a:ea typeface="맑은 고딕"/>
-              </a:rPr>
-              <a:t>A</a:t>
-            </a:r>
-          </a:p>
-        </p:txBody>
-      </p:sp>
-      <p:sp>
-        <p:nvSpPr>
-          <p:cNvPr id="32" name="텍스트"/>
-          <p:cNvSpPr txBox="1"/>
-          <p:nvPr/>
-        </p:nvSpPr>
-        <p:spPr>
-          <a:xfrm>
-            <a:off x="396000" y="1446622"/>
-            <a:ext cx="1584000" cy="168911"/>
-          </a:xfrm>
-          <a:prstGeom prst="rect">
-            <a:avLst/>
-          </a:prstGeom>
-          <a:noFill/>
-        </p:spPr>
-        <p:txBody>
-          <a:bodyPr wrap="square" lIns="0" rIns="0" tIns="0" bIns="0" anchor="t">
-            <a:spAutoFit/>
-          </a:bodyPr>
-          <a:lstStyle/>
-          <a:p>
-            <a:pPr algn="l">
-              <a:lnSpc>
-                <a:spcPts val="1015"/>
-              </a:lnSpc>
-            </a:pPr>
-            <a:r>
-              <a:rPr sz="700" b="0">
-                <a:solidFill>
-                  <a:srgbClr val="FFFFFF"/>
-                </a:solidFill>
-                <a:latin typeface="맑은 고딕"/>
-                <a:ea typeface="맑은 고딕"/>
-              </a:rPr>
-              <a:t>주소를 입력해 주세요</a:t>
-            </a:r>
-          </a:p>
-        </p:txBody>
-      </p:sp>
-      <p:sp>
-        <p:nvSpPr>
-          <p:cNvPr id="33" name="Oval 32"/>
-          <p:cNvSpPr/>
-          <p:nvPr/>
-        </p:nvSpPr>
-        <p:spPr>
-          <a:xfrm>
-            <a:off x="2816640" y="1124640"/>
-            <a:ext cx="126720" cy="126720"/>
-          </a:xfrm>
-          <a:prstGeom prst="ellipse">
-            <a:avLst/>
-          </a:prstGeom>
-          <a:solidFill>
-            <a:srgbClr val="F4CDD3"/>
-          </a:solidFill>
-          <a:ln>
-            <a:noFill/>
-          </a:ln>
-        </p:spPr>
-        <p:txBody>
-          <a:bodyPr rtlCol="0" anchor="ctr"/>
-          <a:lstStyle/>
-          <a:p>
-            <a:pPr algn="ctr"/>
-          </a:p>
-        </p:txBody>
-      </p:sp>
-      <p:cxnSp>
-        <p:nvCxnSpPr>
-          <p:cNvPr id="34" name="Connector 33"/>
-          <p:cNvCxnSpPr/>
-          <p:nvPr/>
-        </p:nvCxnSpPr>
-        <p:spPr>
-          <a:xfrm>
-            <a:off x="2972160" y="1188000"/>
-            <a:ext cx="40320" cy="0"/>
-          </a:xfrm>
-          <a:prstGeom prst="line">
-            <a:avLst/>
-          </a:prstGeom>
-          <a:ln w="17280">
-            <a:solidFill>
-              <a:srgbClr val="B54C5E"/>
-            </a:solidFill>
-          </a:ln>
-        </p:spPr>
-      </p:cxnSp>
-      <p:cxnSp>
-        <p:nvCxnSpPr>
-          <p:cNvPr id="35" name="Connector 34"/>
-          <p:cNvCxnSpPr/>
-          <p:nvPr/>
-        </p:nvCxnSpPr>
-        <p:spPr>
-          <a:xfrm>
-            <a:off x="2945167" y="1253167"/>
-            <a:ext cx="28511" cy="28511"/>
-          </a:xfrm>
-          <a:prstGeom prst="line">
-            <a:avLst/>
-          </a:prstGeom>
-          <a:ln w="17280">
-            <a:solidFill>
-              <a:srgbClr val="B54C5E"/>
-            </a:solidFill>
-          </a:ln>
-        </p:spPr>
-      </p:cxnSp>
-      <p:cxnSp>
-        <p:nvCxnSpPr>
-          <p:cNvPr id="36" name="Connector 35"/>
-          <p:cNvCxnSpPr/>
-          <p:nvPr/>
-        </p:nvCxnSpPr>
-        <p:spPr>
-          <a:xfrm>
-            <a:off x="2880000" y="1280160"/>
-            <a:ext cx="0" cy="40320"/>
-          </a:xfrm>
-          <a:prstGeom prst="line">
-            <a:avLst/>
-          </a:prstGeom>
-          <a:ln w="17280">
-            <a:solidFill>
-              <a:srgbClr val="B54C5E"/>
-            </a:solidFill>
-          </a:ln>
-        </p:spPr>
-      </p:cxnSp>
-      <p:cxnSp>
-        <p:nvCxnSpPr>
-          <p:cNvPr id="37" name="Connector 36"/>
-          <p:cNvCxnSpPr/>
-          <p:nvPr/>
-        </p:nvCxnSpPr>
-        <p:spPr>
-          <a:xfrm flipH="1">
-            <a:off x="2786322" y="1253167"/>
-            <a:ext cx="28511" cy="28511"/>
-          </a:xfrm>
-          <a:prstGeom prst="line">
-            <a:avLst/>
-          </a:prstGeom>
-          <a:ln w="17280">
-            <a:solidFill>
-              <a:srgbClr val="B54C5E"/>
-            </a:solidFill>
-          </a:ln>
-        </p:spPr>
-      </p:cxnSp>
-      <p:cxnSp>
-        <p:nvCxnSpPr>
-          <p:cNvPr id="38" name="Connector 37"/>
-          <p:cNvCxnSpPr/>
-          <p:nvPr/>
-        </p:nvCxnSpPr>
-        <p:spPr>
-          <a:xfrm flipH="1">
-            <a:off x="2747520" y="1188000"/>
-            <a:ext cx="40320" cy="0"/>
-          </a:xfrm>
-          <a:prstGeom prst="line">
-            <a:avLst/>
-          </a:prstGeom>
-          <a:ln w="17280">
-            <a:solidFill>
-              <a:srgbClr val="B54C5E"/>
-            </a:solidFill>
-          </a:ln>
-        </p:spPr>
-      </p:cxnSp>
-      <p:cxnSp>
-        <p:nvCxnSpPr>
-          <p:cNvPr id="39" name="Connector 38"/>
-          <p:cNvCxnSpPr/>
-          <p:nvPr/>
-        </p:nvCxnSpPr>
-        <p:spPr>
-          <a:xfrm flipH="1" flipV="1">
-            <a:off x="2786322" y="1094322"/>
-            <a:ext cx="28511" cy="28511"/>
-          </a:xfrm>
-          <a:prstGeom prst="line">
-            <a:avLst/>
-          </a:prstGeom>
-          <a:ln w="17280">
-            <a:solidFill>
-              <a:srgbClr val="B54C5E"/>
-            </a:solidFill>
-          </a:ln>
-        </p:spPr>
-      </p:cxnSp>
-      <p:cxnSp>
-        <p:nvCxnSpPr>
-          <p:cNvPr id="40" name="Connector 39"/>
-          <p:cNvCxnSpPr/>
-          <p:nvPr/>
-        </p:nvCxnSpPr>
-        <p:spPr>
-          <a:xfrm flipV="1">
-            <a:off x="2880000" y="1055520"/>
-            <a:ext cx="0" cy="40320"/>
-          </a:xfrm>
-          <a:prstGeom prst="line">
-            <a:avLst/>
-          </a:prstGeom>
-          <a:ln w="17280">
-            <a:solidFill>
-              <a:srgbClr val="B54C5E"/>
-            </a:solidFill>
-          </a:ln>
-        </p:spPr>
-      </p:cxnSp>
-      <p:cxnSp>
-        <p:nvCxnSpPr>
-          <p:cNvPr id="41" name="Connector 40"/>
-          <p:cNvCxnSpPr/>
-          <p:nvPr/>
-        </p:nvCxnSpPr>
-        <p:spPr>
-          <a:xfrm flipV="1">
-            <a:off x="2945167" y="1094322"/>
-            <a:ext cx="28511" cy="28511"/>
-          </a:xfrm>
-          <a:prstGeom prst="line">
-            <a:avLst/>
-          </a:prstGeom>
-          <a:ln w="17280">
-            <a:solidFill>
-              <a:srgbClr val="B54C5E"/>
-            </a:solidFill>
-          </a:ln>
-        </p:spPr>
-      </p:cxnSp>
     </p:spTree>
   </p:cSld>
   <p:clrMapOvr>
@@ -4346,7 +3380,7 @@
     <p:bg>
       <p:bgPr>
         <a:solidFill>
-          <a:srgbClr val="FBF8F2"/>
+          <a:srgbClr val="4CD964"/>
         </a:solidFill>
         <a:effectLst/>
       </p:bgPr>
@@ -4360,20 +3394,107 @@
       <p:grpSpPr/>
       <p:sp>
         <p:nvSpPr>
-          <p:cNvPr id="2" name="Rectangle 1"/>
+          <p:cNvPr id="2" name="Freeform 1"/>
           <p:cNvSpPr/>
           <p:nvPr/>
         </p:nvSpPr>
         <p:spPr>
           <a:xfrm>
             <a:off x="0" y="0"/>
-            <a:ext cx="273600" cy="1800000"/>
+            <a:ext cx="1080000" cy="1080000"/>
           </a:xfrm>
-          <a:prstGeom prst="rect">
+          <a:custGeom>
             <a:avLst/>
-          </a:prstGeom>
+            <a:gdLst/>
+            <a:ahLst/>
+            <a:cxnLst/>
+            <a:rect l="l" t="t" r="r" b="b"/>
+            <a:pathLst>
+              <a:path w="1080000" h="1080000">
+                <a:moveTo>
+                  <a:pt x="0" y="0"/>
+                </a:moveTo>
+                <a:lnTo>
+                  <a:pt x="1080000" y="0"/>
+                </a:lnTo>
+                <a:lnTo>
+                  <a:pt x="1077688" y="70635"/>
+                </a:lnTo>
+                <a:lnTo>
+                  <a:pt x="1070760" y="140968"/>
+                </a:lnTo>
+                <a:lnTo>
+                  <a:pt x="1059248" y="210698"/>
+                </a:lnTo>
+                <a:lnTo>
+                  <a:pt x="1043200" y="279525"/>
+                </a:lnTo>
+                <a:lnTo>
+                  <a:pt x="1022685" y="347155"/>
+                </a:lnTo>
+                <a:lnTo>
+                  <a:pt x="997790" y="413298"/>
+                </a:lnTo>
+                <a:lnTo>
+                  <a:pt x="968623" y="477672"/>
+                </a:lnTo>
+                <a:lnTo>
+                  <a:pt x="935307" y="540000"/>
+                </a:lnTo>
+                <a:lnTo>
+                  <a:pt x="897987" y="600016"/>
+                </a:lnTo>
+                <a:lnTo>
+                  <a:pt x="856822" y="657462"/>
+                </a:lnTo>
+                <a:lnTo>
+                  <a:pt x="811987" y="712093"/>
+                </a:lnTo>
+                <a:lnTo>
+                  <a:pt x="763675" y="763675"/>
+                </a:lnTo>
+                <a:lnTo>
+                  <a:pt x="712093" y="811987"/>
+                </a:lnTo>
+                <a:lnTo>
+                  <a:pt x="657462" y="856822"/>
+                </a:lnTo>
+                <a:lnTo>
+                  <a:pt x="600016" y="897987"/>
+                </a:lnTo>
+                <a:lnTo>
+                  <a:pt x="540000" y="935307"/>
+                </a:lnTo>
+                <a:lnTo>
+                  <a:pt x="477672" y="968623"/>
+                </a:lnTo>
+                <a:lnTo>
+                  <a:pt x="413298" y="997790"/>
+                </a:lnTo>
+                <a:lnTo>
+                  <a:pt x="347155" y="1022685"/>
+                </a:lnTo>
+                <a:lnTo>
+                  <a:pt x="279525" y="1043200"/>
+                </a:lnTo>
+                <a:lnTo>
+                  <a:pt x="210698" y="1059248"/>
+                </a:lnTo>
+                <a:lnTo>
+                  <a:pt x="140968" y="1070760"/>
+                </a:lnTo>
+                <a:lnTo>
+                  <a:pt x="70635" y="1077688"/>
+                </a:lnTo>
+                <a:lnTo>
+                  <a:pt x="0" y="1080000"/>
+                </a:lnTo>
+                <a:close/>
+              </a:path>
+            </a:pathLst>
+          </a:custGeom>
           <a:solidFill>
-            <a:srgbClr val="868D3F"/>
+            <a:srgbClr val="12151C"/>
           </a:solidFill>
           <a:ln>
             <a:noFill/>
@@ -4389,20 +3510,107 @@
       </p:sp>
       <p:sp>
         <p:nvSpPr>
-          <p:cNvPr id="3" name="Oval 2"/>
+          <p:cNvPr id="3" name="Freeform 2"/>
           <p:cNvSpPr/>
           <p:nvPr/>
         </p:nvSpPr>
         <p:spPr>
           <a:xfrm>
-            <a:off x="101952" y="202752"/>
-            <a:ext cx="69696" cy="69696"/>
+            <a:off x="0" y="0"/>
+            <a:ext cx="684000" cy="684000"/>
           </a:xfrm>
-          <a:prstGeom prst="ellipse">
+          <a:custGeom>
             <a:avLst/>
-          </a:prstGeom>
+            <a:gdLst/>
+            <a:ahLst/>
+            <a:cxnLst/>
+            <a:rect l="l" t="t" r="r" b="b"/>
+            <a:pathLst>
+              <a:path w="684000" h="684000">
+                <a:moveTo>
+                  <a:pt x="0" y="0"/>
+                </a:moveTo>
+                <a:lnTo>
+                  <a:pt x="684000" y="0"/>
+                </a:lnTo>
+                <a:lnTo>
+                  <a:pt x="682536" y="44736"/>
+                </a:lnTo>
+                <a:lnTo>
+                  <a:pt x="678148" y="89280"/>
+                </a:lnTo>
+                <a:lnTo>
+                  <a:pt x="670857" y="133442"/>
+                </a:lnTo>
+                <a:lnTo>
+                  <a:pt x="660693" y="177032"/>
+                </a:lnTo>
+                <a:lnTo>
+                  <a:pt x="647700" y="219865"/>
+                </a:lnTo>
+                <a:lnTo>
+                  <a:pt x="631934" y="261755"/>
+                </a:lnTo>
+                <a:lnTo>
+                  <a:pt x="613461" y="302525"/>
+                </a:lnTo>
+                <a:lnTo>
+                  <a:pt x="592361" y="342000"/>
+                </a:lnTo>
+                <a:lnTo>
+                  <a:pt x="568725" y="380010"/>
+                </a:lnTo>
+                <a:lnTo>
+                  <a:pt x="542654" y="416393"/>
+                </a:lnTo>
+                <a:lnTo>
+                  <a:pt x="514258" y="450993"/>
+                </a:lnTo>
+                <a:lnTo>
+                  <a:pt x="483661" y="483661"/>
+                </a:lnTo>
+                <a:lnTo>
+                  <a:pt x="450993" y="514258"/>
+                </a:lnTo>
+                <a:lnTo>
+                  <a:pt x="416393" y="542654"/>
+                </a:lnTo>
+                <a:lnTo>
+                  <a:pt x="380010" y="568725"/>
+                </a:lnTo>
+                <a:lnTo>
+                  <a:pt x="342000" y="592361"/>
+                </a:lnTo>
+                <a:lnTo>
+                  <a:pt x="302525" y="613461"/>
+                </a:lnTo>
+                <a:lnTo>
+                  <a:pt x="261755" y="631934"/>
+                </a:lnTo>
+                <a:lnTo>
+                  <a:pt x="219865" y="647700"/>
+                </a:lnTo>
+                <a:lnTo>
+                  <a:pt x="177032" y="660693"/>
+                </a:lnTo>
+                <a:lnTo>
+                  <a:pt x="133442" y="670857"/>
+                </a:lnTo>
+                <a:lnTo>
+                  <a:pt x="89280" y="678148"/>
+                </a:lnTo>
+                <a:lnTo>
+                  <a:pt x="44736" y="682536"/>
+                </a:lnTo>
+                <a:lnTo>
+                  <a:pt x="0" y="684000"/>
+                </a:lnTo>
+                <a:close/>
+              </a:path>
+            </a:pathLst>
+          </a:custGeom>
           <a:solidFill>
-            <a:srgbClr val="FFFFFF"/>
+            <a:srgbClr val="70E183"/>
           </a:solidFill>
           <a:ln>
             <a:noFill/>
@@ -4416,184 +3624,16 @@
           </a:p>
         </p:txBody>
       </p:sp>
-      <p:cxnSp>
-        <p:nvCxnSpPr>
-          <p:cNvPr id="4" name="Connector 3"/>
-          <p:cNvCxnSpPr/>
+      <p:sp>
+        <p:nvSpPr>
+          <p:cNvPr id="4" name="텍스트"/>
+          <p:cNvSpPr txBox="1"/>
           <p:nvPr/>
-        </p:nvCxnSpPr>
+        </p:nvSpPr>
         <p:spPr>
           <a:xfrm>
-            <a:off x="187488" y="237600"/>
-            <a:ext cx="22176" cy="0"/>
-          </a:xfrm>
-          <a:prstGeom prst="line">
-            <a:avLst/>
-          </a:prstGeom>
-          <a:ln w="9504">
-            <a:solidFill>
-              <a:srgbClr val="737373"/>
-            </a:solidFill>
-          </a:ln>
-        </p:spPr>
-      </p:cxnSp>
-      <p:cxnSp>
-        <p:nvCxnSpPr>
-          <p:cNvPr id="5" name="Connector 4"/>
-          <p:cNvCxnSpPr/>
-          <p:nvPr/>
-        </p:nvCxnSpPr>
-        <p:spPr>
-          <a:xfrm>
-            <a:off x="172642" y="273442"/>
-            <a:ext cx="15681" cy="15681"/>
-          </a:xfrm>
-          <a:prstGeom prst="line">
-            <a:avLst/>
-          </a:prstGeom>
-          <a:ln w="9504">
-            <a:solidFill>
-              <a:srgbClr val="737373"/>
-            </a:solidFill>
-          </a:ln>
-        </p:spPr>
-      </p:cxnSp>
-      <p:cxnSp>
-        <p:nvCxnSpPr>
-          <p:cNvPr id="6" name="Connector 5"/>
-          <p:cNvCxnSpPr/>
-          <p:nvPr/>
-        </p:nvCxnSpPr>
-        <p:spPr>
-          <a:xfrm>
-            <a:off x="136800" y="288288"/>
-            <a:ext cx="0" cy="22176"/>
-          </a:xfrm>
-          <a:prstGeom prst="line">
-            <a:avLst/>
-          </a:prstGeom>
-          <a:ln w="9504">
-            <a:solidFill>
-              <a:srgbClr val="737373"/>
-            </a:solidFill>
-          </a:ln>
-        </p:spPr>
-      </p:cxnSp>
-      <p:cxnSp>
-        <p:nvCxnSpPr>
-          <p:cNvPr id="7" name="Connector 6"/>
-          <p:cNvCxnSpPr/>
-          <p:nvPr/>
-        </p:nvCxnSpPr>
-        <p:spPr>
-          <a:xfrm flipH="1">
-            <a:off x="85277" y="273442"/>
-            <a:ext cx="15681" cy="15681"/>
-          </a:xfrm>
-          <a:prstGeom prst="line">
-            <a:avLst/>
-          </a:prstGeom>
-          <a:ln w="9504">
-            <a:solidFill>
-              <a:srgbClr val="737373"/>
-            </a:solidFill>
-          </a:ln>
-        </p:spPr>
-      </p:cxnSp>
-      <p:cxnSp>
-        <p:nvCxnSpPr>
-          <p:cNvPr id="8" name="Connector 7"/>
-          <p:cNvCxnSpPr/>
-          <p:nvPr/>
-        </p:nvCxnSpPr>
-        <p:spPr>
-          <a:xfrm flipH="1">
-            <a:off x="63936" y="237600"/>
-            <a:ext cx="22176" cy="0"/>
-          </a:xfrm>
-          <a:prstGeom prst="line">
-            <a:avLst/>
-          </a:prstGeom>
-          <a:ln w="9504">
-            <a:solidFill>
-              <a:srgbClr val="737373"/>
-            </a:solidFill>
-          </a:ln>
-        </p:spPr>
-      </p:cxnSp>
-      <p:cxnSp>
-        <p:nvCxnSpPr>
-          <p:cNvPr id="9" name="Connector 8"/>
-          <p:cNvCxnSpPr/>
-          <p:nvPr/>
-        </p:nvCxnSpPr>
-        <p:spPr>
-          <a:xfrm flipH="1" flipV="1">
-            <a:off x="85277" y="186077"/>
-            <a:ext cx="15681" cy="15681"/>
-          </a:xfrm>
-          <a:prstGeom prst="line">
-            <a:avLst/>
-          </a:prstGeom>
-          <a:ln w="9504">
-            <a:solidFill>
-              <a:srgbClr val="737373"/>
-            </a:solidFill>
-          </a:ln>
-        </p:spPr>
-      </p:cxnSp>
-      <p:cxnSp>
-        <p:nvCxnSpPr>
-          <p:cNvPr id="10" name="Connector 9"/>
-          <p:cNvCxnSpPr/>
-          <p:nvPr/>
-        </p:nvCxnSpPr>
-        <p:spPr>
-          <a:xfrm flipV="1">
-            <a:off x="136800" y="164736"/>
-            <a:ext cx="0" cy="22176"/>
-          </a:xfrm>
-          <a:prstGeom prst="line">
-            <a:avLst/>
-          </a:prstGeom>
-          <a:ln w="9504">
-            <a:solidFill>
-              <a:srgbClr val="737373"/>
-            </a:solidFill>
-          </a:ln>
-        </p:spPr>
-      </p:cxnSp>
-      <p:cxnSp>
-        <p:nvCxnSpPr>
-          <p:cNvPr id="11" name="Connector 10"/>
-          <p:cNvCxnSpPr/>
-          <p:nvPr/>
-        </p:nvCxnSpPr>
-        <p:spPr>
-          <a:xfrm flipV="1">
-            <a:off x="172642" y="186077"/>
-            <a:ext cx="15681" cy="15681"/>
-          </a:xfrm>
-          <a:prstGeom prst="line">
-            <a:avLst/>
-          </a:prstGeom>
-          <a:ln w="9504">
-            <a:solidFill>
-              <a:srgbClr val="737373"/>
-            </a:solidFill>
-          </a:ln>
-        </p:spPr>
-      </p:cxnSp>
-      <p:sp>
-        <p:nvSpPr>
-          <p:cNvPr id="12" name="텍스트"/>
-          <p:cNvSpPr txBox="1"/>
-          <p:nvPr/>
-        </p:nvSpPr>
-        <p:spPr>
-          <a:xfrm>
-            <a:off x="504000" y="396000"/>
-            <a:ext cx="1800000" cy="720000"/>
+            <a:off x="1188000" y="1044000"/>
+            <a:ext cx="1800000" cy="432000"/>
           </a:xfrm>
           <a:prstGeom prst="rect">
             <a:avLst/>
@@ -4601,23 +3641,23 @@
           <a:noFill/>
         </p:spPr>
         <p:txBody>
-          <a:bodyPr wrap="square" lIns="0" rIns="0" tIns="0" bIns="0" anchor="ctr">
+          <a:bodyPr wrap="square" lIns="0" rIns="0" tIns="0" bIns="0" anchor="t">
             <a:spAutoFit/>
           </a:bodyPr>
           <a:lstStyle/>
           <a:p>
-            <a:pPr algn="l">
+            <a:pPr algn="r">
               <a:lnSpc>
-                <a:spcPts val="1667"/>
+                <a:spcPts val="1739"/>
               </a:lnSpc>
             </a:pPr>
             <a:r>
-              <a:rPr sz="1150" b="1">
+              <a:rPr sz="1200" b="1">
                 <a:solidFill>
-                  <a:srgbClr val="573371"/>
+                  <a:srgbClr val="12151C"/>
                 </a:solidFill>
-                <a:latin typeface="바탕"/>
-                <a:ea typeface="바탕"/>
+                <a:latin typeface="맑은 고딕"/>
+                <a:ea typeface="맑은 고딕"/>
               </a:rPr>
               <a:t>한 줄의 응원을 건넵니다</a:t>
             </a:r>
@@ -4626,14 +3666,14 @@
       </p:sp>
       <p:sp>
         <p:nvSpPr>
-          <p:cNvPr id="13" name="텍스트"/>
+          <p:cNvPr id="5" name="텍스트"/>
           <p:cNvSpPr txBox="1"/>
           <p:nvPr/>
         </p:nvSpPr>
         <p:spPr>
           <a:xfrm>
-            <a:off x="504000" y="1260000"/>
-            <a:ext cx="1728000" cy="108000"/>
+            <a:off x="1188000" y="1526400"/>
+            <a:ext cx="1800000" cy="123826"/>
           </a:xfrm>
           <a:prstGeom prst="rect">
             <a:avLst/>
@@ -4646,90 +3686,20 @@
           </a:bodyPr>
           <a:lstStyle/>
           <a:p>
-            <a:pPr algn="l">
+            <a:pPr algn="r">
               <a:lnSpc>
-                <a:spcPts val="1087"/>
+                <a:spcPts val="942"/>
               </a:lnSpc>
             </a:pPr>
             <a:r>
-              <a:rPr sz="750" b="1" spc="200">
+              <a:rPr sz="650" b="1" spc="200">
                 <a:solidFill>
-                  <a:srgbClr val="7A6686"/>
+                  <a:srgbClr val="1F402C"/>
                 </a:solidFill>
                 <a:latin typeface="맑은 고딕"/>
                 <a:ea typeface="맑은 고딕"/>
               </a:rPr>
               <a:t>학교 · 학원 이름</a:t>
-            </a:r>
-          </a:p>
-        </p:txBody>
-      </p:sp>
-      <p:sp>
-        <p:nvSpPr>
-          <p:cNvPr id="14" name="Rectangle 13"/>
-          <p:cNvSpPr/>
-          <p:nvPr/>
-        </p:nvSpPr>
-        <p:spPr>
-          <a:xfrm>
-            <a:off x="2520000" y="216000"/>
-            <a:ext cx="468000" cy="468000"/>
-          </a:xfrm>
-          <a:prstGeom prst="rect">
-            <a:avLst/>
-          </a:prstGeom>
-          <a:noFill/>
-          <a:ln w="9000">
-            <a:solidFill>
-              <a:srgbClr val="868D3F"/>
-            </a:solidFill>
-            <a:prstDash val="dash"/>
-          </a:ln>
-        </p:spPr>
-        <p:txBody>
-          <a:bodyPr rtlCol="0" anchor="ctr"/>
-          <a:lstStyle/>
-          <a:p>
-            <a:pPr algn="ctr"/>
-          </a:p>
-        </p:txBody>
-      </p:sp>
-      <p:sp>
-        <p:nvSpPr>
-          <p:cNvPr id="15" name="텍스트"/>
-          <p:cNvSpPr txBox="1"/>
-          <p:nvPr/>
-        </p:nvSpPr>
-        <p:spPr>
-          <a:xfrm>
-            <a:off x="2520000" y="216000"/>
-            <a:ext cx="468000" cy="468000"/>
-          </a:xfrm>
-          <a:prstGeom prst="rect">
-            <a:avLst/>
-          </a:prstGeom>
-          <a:noFill/>
-        </p:spPr>
-        <p:txBody>
-          <a:bodyPr wrap="square" lIns="0" rIns="0" tIns="0" bIns="0" anchor="ctr">
-            <a:spAutoFit/>
-          </a:bodyPr>
-          <a:lstStyle/>
-          <a:p>
-            <a:pPr algn="ctr">
-              <a:lnSpc>
-                <a:spcPts val="1305"/>
-              </a:lnSpc>
-            </a:pPr>
-            <a:r>
-              <a:rPr sz="900" b="1">
-                <a:solidFill>
-                  <a:srgbClr val="7A6686"/>
-                </a:solidFill>
-                <a:latin typeface="맑은 고딕"/>
-                <a:ea typeface="맑은 고딕"/>
-              </a:rPr>
-              <a:t>QR</a:t>
             </a:r>
           </a:p>
         </p:txBody>

--- a/public/fun/cards/teacher/teacher-30.pptx
+++ b/public/fun/cards/teacher/teacher-30.pptx
@@ -3105,8 +3105,8 @@
         </p:nvSpPr>
         <p:spPr>
           <a:xfrm>
-            <a:off x="252000" y="223200"/>
-            <a:ext cx="2016000" cy="133351"/>
+            <a:off x="252000" y="252000"/>
+            <a:ext cx="1512000" cy="123826"/>
           </a:xfrm>
           <a:prstGeom prst="rect">
             <a:avLst/>
@@ -3121,11 +3121,11 @@
           <a:p>
             <a:pPr algn="l">
               <a:lnSpc>
-                <a:spcPts val="1015"/>
+                <a:spcPts val="942"/>
               </a:lnSpc>
             </a:pPr>
             <a:r>
-              <a:rPr sz="700" b="1" spc="200">
+              <a:rPr sz="650" b="1" spc="220">
                 <a:solidFill>
                   <a:srgbClr val="6B7280"/>
                 </a:solidFill>
@@ -3137,16 +3137,37 @@
           </a:p>
         </p:txBody>
       </p:sp>
-      <p:sp>
-        <p:nvSpPr>
-          <p:cNvPr id="3" name="텍스트"/>
+      <p:cxnSp>
+        <p:nvCxnSpPr>
+          <p:cNvPr id="3" name="Connector 2"/>
+          <p:cNvCxnSpPr/>
+          <p:nvPr/>
+        </p:nvCxnSpPr>
+        <p:spPr>
+          <a:xfrm>
+            <a:off x="252000" y="388800"/>
+            <a:ext cx="2736000" cy="0"/>
+          </a:xfrm>
+          <a:prstGeom prst="line">
+            <a:avLst/>
+          </a:prstGeom>
+          <a:ln w="3600">
+            <a:solidFill>
+              <a:srgbClr val="DCDFE4"/>
+            </a:solidFill>
+          </a:ln>
+        </p:spPr>
+      </p:cxnSp>
+      <p:sp>
+        <p:nvSpPr>
+          <p:cNvPr id="4" name="텍스트"/>
           <p:cNvSpPr txBox="1"/>
           <p:nvPr/>
         </p:nvSpPr>
         <p:spPr>
           <a:xfrm>
-            <a:off x="252000" y="468000"/>
-            <a:ext cx="2520000" cy="360000"/>
+            <a:off x="252000" y="576000"/>
+            <a:ext cx="1800000" cy="237600"/>
           </a:xfrm>
           <a:prstGeom prst="rect">
             <a:avLst/>
@@ -3161,11 +3182,11 @@
           <a:p>
             <a:pPr algn="l">
               <a:lnSpc>
-                <a:spcPts val="3190"/>
+                <a:spcPts val="1957"/>
               </a:lnSpc>
             </a:pPr>
             <a:r>
-              <a:rPr sz="2200" b="1">
+              <a:rPr sz="1350" b="1" spc="120">
                 <a:solidFill>
                   <a:srgbClr val="12151C"/>
                 </a:solidFill>
@@ -3179,14 +3200,14 @@
       </p:sp>
       <p:sp>
         <p:nvSpPr>
-          <p:cNvPr id="4" name="텍스트"/>
+          <p:cNvPr id="5" name="텍스트"/>
           <p:cNvSpPr txBox="1"/>
           <p:nvPr/>
         </p:nvSpPr>
         <p:spPr>
           <a:xfrm>
-            <a:off x="252000" y="871200"/>
-            <a:ext cx="2520000" cy="171451"/>
+            <a:off x="252000" y="828000"/>
+            <a:ext cx="1800000" cy="133351"/>
           </a:xfrm>
           <a:prstGeom prst="rect">
             <a:avLst/>
@@ -3201,11 +3222,11 @@
           <a:p>
             <a:pPr algn="l">
               <a:lnSpc>
-                <a:spcPts val="1305"/>
+                <a:spcPts val="1015"/>
               </a:lnSpc>
             </a:pPr>
             <a:r>
-              <a:rPr sz="900" b="0">
+              <a:rPr sz="700" b="0" spc="60">
                 <a:solidFill>
                   <a:srgbClr val="6B7280"/>
                 </a:solidFill>
@@ -3219,14 +3240,14 @@
       </p:sp>
       <p:sp>
         <p:nvSpPr>
-          <p:cNvPr id="5" name="텍스트"/>
+          <p:cNvPr id="6" name="텍스트"/>
           <p:cNvSpPr txBox="1"/>
           <p:nvPr/>
         </p:nvSpPr>
         <p:spPr>
           <a:xfrm>
-            <a:off x="252000" y="1216800"/>
-            <a:ext cx="2520000" cy="129541"/>
+            <a:off x="252000" y="1036800"/>
+            <a:ext cx="2520000" cy="123826"/>
           </a:xfrm>
           <a:prstGeom prst="rect">
             <a:avLst/>
@@ -3241,11 +3262,11 @@
           <a:p>
             <a:pPr algn="l">
               <a:lnSpc>
-                <a:spcPts val="986"/>
+                <a:spcPts val="942"/>
               </a:lnSpc>
             </a:pPr>
             <a:r>
-              <a:rPr sz="680" b="0">
+              <a:rPr sz="650" b="0">
                 <a:solidFill>
                   <a:srgbClr val="6B7280"/>
                 </a:solidFill>
@@ -3259,14 +3280,14 @@
       </p:sp>
       <p:sp>
         <p:nvSpPr>
-          <p:cNvPr id="6" name="Rectangle 5"/>
+          <p:cNvPr id="7" name="Rectangle 6"/>
           <p:cNvSpPr/>
           <p:nvPr/>
         </p:nvSpPr>
         <p:spPr>
           <a:xfrm>
-            <a:off x="0" y="1476000"/>
-            <a:ext cx="3240000" cy="324000"/>
+            <a:off x="0" y="1339200"/>
+            <a:ext cx="3240000" cy="460800"/>
           </a:xfrm>
           <a:prstGeom prst="rect">
             <a:avLst/>
@@ -3288,14 +3309,14 @@
       </p:sp>
       <p:sp>
         <p:nvSpPr>
-          <p:cNvPr id="7" name="텍스트"/>
+          <p:cNvPr id="8" name="텍스트"/>
           <p:cNvSpPr txBox="1"/>
           <p:nvPr/>
         </p:nvSpPr>
         <p:spPr>
           <a:xfrm>
-            <a:off x="252000" y="1569600"/>
-            <a:ext cx="1296000" cy="133351"/>
+            <a:off x="252000" y="1476000"/>
+            <a:ext cx="936000" cy="91441"/>
           </a:xfrm>
           <a:prstGeom prst="rect">
             <a:avLst/>
@@ -3310,11 +3331,53 @@
           <a:p>
             <a:pPr algn="l">
               <a:lnSpc>
-                <a:spcPts val="1015"/>
+                <a:spcPts val="696"/>
               </a:lnSpc>
             </a:pPr>
             <a:r>
-              <a:rPr sz="700" b="1">
+              <a:rPr sz="480" b="1" spc="140">
+                <a:solidFill>
+                  <a:srgbClr val="12151C">
+                    <a:alpha val="70000"/>
+                  </a:srgbClr>
+                </a:solidFill>
+                <a:latin typeface="맑은 고딕"/>
+                <a:ea typeface="맑은 고딕"/>
+              </a:rPr>
+              <a:t>TEL</a:t>
+            </a:r>
+          </a:p>
+        </p:txBody>
+      </p:sp>
+      <p:sp>
+        <p:nvSpPr>
+          <p:cNvPr id="9" name="텍스트"/>
+          <p:cNvSpPr txBox="1"/>
+          <p:nvPr/>
+        </p:nvSpPr>
+        <p:spPr>
+          <a:xfrm>
+            <a:off x="252000" y="1576800"/>
+            <a:ext cx="936000" cy="123826"/>
+          </a:xfrm>
+          <a:prstGeom prst="rect">
+            <a:avLst/>
+          </a:prstGeom>
+          <a:noFill/>
+        </p:spPr>
+        <p:txBody>
+          <a:bodyPr wrap="square" lIns="0" rIns="0" tIns="0" bIns="0" anchor="t">
+            <a:spAutoFit/>
+          </a:bodyPr>
+          <a:lstStyle/>
+          <a:p>
+            <a:pPr algn="l">
+              <a:lnSpc>
+                <a:spcPts val="942"/>
+              </a:lnSpc>
+            </a:pPr>
+            <a:r>
+              <a:rPr sz="650" b="1">
                 <a:solidFill>
                   <a:srgbClr val="12151C"/>
                 </a:solidFill>
@@ -3328,14 +3391,14 @@
       </p:sp>
       <p:sp>
         <p:nvSpPr>
-          <p:cNvPr id="8" name="텍스트"/>
+          <p:cNvPr id="10" name="텍스트"/>
           <p:cNvSpPr txBox="1"/>
           <p:nvPr/>
         </p:nvSpPr>
         <p:spPr>
           <a:xfrm>
-            <a:off x="1656000" y="1569600"/>
-            <a:ext cx="1368000" cy="133351"/>
+            <a:off x="1188000" y="1476000"/>
+            <a:ext cx="1080000" cy="91441"/>
           </a:xfrm>
           <a:prstGeom prst="rect">
             <a:avLst/>
@@ -3350,11 +3413,53 @@
           <a:p>
             <a:pPr algn="l">
               <a:lnSpc>
-                <a:spcPts val="1015"/>
+                <a:spcPts val="696"/>
               </a:lnSpc>
             </a:pPr>
             <a:r>
-              <a:rPr sz="700" b="1">
+              <a:rPr sz="480" b="1" spc="140">
+                <a:solidFill>
+                  <a:srgbClr val="12151C">
+                    <a:alpha val="70000"/>
+                  </a:srgbClr>
+                </a:solidFill>
+                <a:latin typeface="맑은 고딕"/>
+                <a:ea typeface="맑은 고딕"/>
+              </a:rPr>
+              <a:t>MAIL</a:t>
+            </a:r>
+          </a:p>
+        </p:txBody>
+      </p:sp>
+      <p:sp>
+        <p:nvSpPr>
+          <p:cNvPr id="11" name="텍스트"/>
+          <p:cNvSpPr txBox="1"/>
+          <p:nvPr/>
+        </p:nvSpPr>
+        <p:spPr>
+          <a:xfrm>
+            <a:off x="1188000" y="1576800"/>
+            <a:ext cx="1080000" cy="123826"/>
+          </a:xfrm>
+          <a:prstGeom prst="rect">
+            <a:avLst/>
+          </a:prstGeom>
+          <a:noFill/>
+        </p:spPr>
+        <p:txBody>
+          <a:bodyPr wrap="square" lIns="0" rIns="0" tIns="0" bIns="0" anchor="t">
+            <a:spAutoFit/>
+          </a:bodyPr>
+          <a:lstStyle/>
+          <a:p>
+            <a:pPr algn="l">
+              <a:lnSpc>
+                <a:spcPts val="942"/>
+              </a:lnSpc>
+            </a:pPr>
+            <a:r>
+              <a:rPr sz="650" b="1">
                 <a:solidFill>
                   <a:srgbClr val="12151C"/>
                 </a:solidFill>
@@ -3366,6 +3471,27 @@
           </a:p>
         </p:txBody>
       </p:sp>
+      <p:cxnSp>
+        <p:nvCxnSpPr>
+          <p:cNvPr id="12" name="Connector 11"/>
+          <p:cNvCxnSpPr/>
+          <p:nvPr/>
+        </p:nvCxnSpPr>
+        <p:spPr>
+          <a:xfrm>
+            <a:off x="1108800" y="1468800"/>
+            <a:ext cx="0" cy="208800"/>
+          </a:xfrm>
+          <a:prstGeom prst="line">
+            <a:avLst/>
+          </a:prstGeom>
+          <a:ln w="3600">
+            <a:solidFill>
+              <a:srgbClr val="12151C"/>
+            </a:solidFill>
+          </a:ln>
+        </p:spPr>
+      </p:cxnSp>
     </p:spTree>
   </p:cSld>
   <p:clrMapOvr>
@@ -3392,248 +3518,184 @@
         <p:nvPr/>
       </p:nvGrpSpPr>
       <p:grpSpPr/>
-      <p:sp>
-        <p:nvSpPr>
-          <p:cNvPr id="2" name="Freeform 1"/>
-          <p:cNvSpPr/>
+      <p:cxnSp>
+        <p:nvCxnSpPr>
+          <p:cNvPr id="2" name="Connector 1"/>
+          <p:cNvCxnSpPr/>
           <p:nvPr/>
-        </p:nvSpPr>
-        <p:spPr>
-          <a:xfrm>
-            <a:off x="0" y="0"/>
-            <a:ext cx="1080000" cy="1080000"/>
-          </a:xfrm>
-          <a:custGeom>
+        </p:nvCxnSpPr>
+        <p:spPr>
+          <a:xfrm>
+            <a:off x="79200" y="108000"/>
+            <a:ext cx="57600" cy="0"/>
+          </a:xfrm>
+          <a:prstGeom prst="line">
             <a:avLst/>
-            <a:gdLst/>
-            <a:ahLst/>
-            <a:cxnLst/>
-            <a:rect l="l" t="t" r="r" b="b"/>
-            <a:pathLst>
-              <a:path w="1080000" h="1080000">
-                <a:moveTo>
-                  <a:pt x="0" y="0"/>
-                </a:moveTo>
-                <a:lnTo>
-                  <a:pt x="1080000" y="0"/>
-                </a:lnTo>
-                <a:lnTo>
-                  <a:pt x="1077688" y="70635"/>
-                </a:lnTo>
-                <a:lnTo>
-                  <a:pt x="1070760" y="140968"/>
-                </a:lnTo>
-                <a:lnTo>
-                  <a:pt x="1059248" y="210698"/>
-                </a:lnTo>
-                <a:lnTo>
-                  <a:pt x="1043200" y="279525"/>
-                </a:lnTo>
-                <a:lnTo>
-                  <a:pt x="1022685" y="347155"/>
-                </a:lnTo>
-                <a:lnTo>
-                  <a:pt x="997790" y="413298"/>
-                </a:lnTo>
-                <a:lnTo>
-                  <a:pt x="968623" y="477672"/>
-                </a:lnTo>
-                <a:lnTo>
-                  <a:pt x="935307" y="540000"/>
-                </a:lnTo>
-                <a:lnTo>
-                  <a:pt x="897987" y="600016"/>
-                </a:lnTo>
-                <a:lnTo>
-                  <a:pt x="856822" y="657462"/>
-                </a:lnTo>
-                <a:lnTo>
-                  <a:pt x="811987" y="712093"/>
-                </a:lnTo>
-                <a:lnTo>
-                  <a:pt x="763675" y="763675"/>
-                </a:lnTo>
-                <a:lnTo>
-                  <a:pt x="712093" y="811987"/>
-                </a:lnTo>
-                <a:lnTo>
-                  <a:pt x="657462" y="856822"/>
-                </a:lnTo>
-                <a:lnTo>
-                  <a:pt x="600016" y="897987"/>
-                </a:lnTo>
-                <a:lnTo>
-                  <a:pt x="540000" y="935307"/>
-                </a:lnTo>
-                <a:lnTo>
-                  <a:pt x="477672" y="968623"/>
-                </a:lnTo>
-                <a:lnTo>
-                  <a:pt x="413298" y="997790"/>
-                </a:lnTo>
-                <a:lnTo>
-                  <a:pt x="347155" y="1022685"/>
-                </a:lnTo>
-                <a:lnTo>
-                  <a:pt x="279525" y="1043200"/>
-                </a:lnTo>
-                <a:lnTo>
-                  <a:pt x="210698" y="1059248"/>
-                </a:lnTo>
-                <a:lnTo>
-                  <a:pt x="140968" y="1070760"/>
-                </a:lnTo>
-                <a:lnTo>
-                  <a:pt x="70635" y="1077688"/>
-                </a:lnTo>
-                <a:lnTo>
-                  <a:pt x="0" y="1080000"/>
-                </a:lnTo>
-                <a:close/>
-              </a:path>
-            </a:pathLst>
-          </a:custGeom>
-          <a:solidFill>
-            <a:srgbClr val="12151C"/>
-          </a:solidFill>
-          <a:ln>
-            <a:noFill/>
+          </a:prstGeom>
+          <a:ln w="3600">
+            <a:solidFill>
+              <a:srgbClr val="1F402C"/>
+            </a:solidFill>
           </a:ln>
         </p:spPr>
-        <p:txBody>
-          <a:bodyPr rtlCol="0" anchor="ctr"/>
-          <a:lstStyle/>
-          <a:p>
-            <a:pPr algn="ctr"/>
-          </a:p>
-        </p:txBody>
-      </p:sp>
-      <p:sp>
-        <p:nvSpPr>
-          <p:cNvPr id="3" name="Freeform 2"/>
-          <p:cNvSpPr/>
+      </p:cxnSp>
+      <p:cxnSp>
+        <p:nvCxnSpPr>
+          <p:cNvPr id="3" name="Connector 2"/>
+          <p:cNvCxnSpPr/>
           <p:nvPr/>
-        </p:nvSpPr>
-        <p:spPr>
-          <a:xfrm>
-            <a:off x="0" y="0"/>
-            <a:ext cx="684000" cy="684000"/>
-          </a:xfrm>
-          <a:custGeom>
+        </p:nvCxnSpPr>
+        <p:spPr>
+          <a:xfrm>
+            <a:off x="108000" y="79200"/>
+            <a:ext cx="0" cy="57600"/>
+          </a:xfrm>
+          <a:prstGeom prst="line">
             <a:avLst/>
-            <a:gdLst/>
-            <a:ahLst/>
-            <a:cxnLst/>
-            <a:rect l="l" t="t" r="r" b="b"/>
-            <a:pathLst>
-              <a:path w="684000" h="684000">
-                <a:moveTo>
-                  <a:pt x="0" y="0"/>
-                </a:moveTo>
-                <a:lnTo>
-                  <a:pt x="684000" y="0"/>
-                </a:lnTo>
-                <a:lnTo>
-                  <a:pt x="682536" y="44736"/>
-                </a:lnTo>
-                <a:lnTo>
-                  <a:pt x="678148" y="89280"/>
-                </a:lnTo>
-                <a:lnTo>
-                  <a:pt x="670857" y="133442"/>
-                </a:lnTo>
-                <a:lnTo>
-                  <a:pt x="660693" y="177032"/>
-                </a:lnTo>
-                <a:lnTo>
-                  <a:pt x="647700" y="219865"/>
-                </a:lnTo>
-                <a:lnTo>
-                  <a:pt x="631934" y="261755"/>
-                </a:lnTo>
-                <a:lnTo>
-                  <a:pt x="613461" y="302525"/>
-                </a:lnTo>
-                <a:lnTo>
-                  <a:pt x="592361" y="342000"/>
-                </a:lnTo>
-                <a:lnTo>
-                  <a:pt x="568725" y="380010"/>
-                </a:lnTo>
-                <a:lnTo>
-                  <a:pt x="542654" y="416393"/>
-                </a:lnTo>
-                <a:lnTo>
-                  <a:pt x="514258" y="450993"/>
-                </a:lnTo>
-                <a:lnTo>
-                  <a:pt x="483661" y="483661"/>
-                </a:lnTo>
-                <a:lnTo>
-                  <a:pt x="450993" y="514258"/>
-                </a:lnTo>
-                <a:lnTo>
-                  <a:pt x="416393" y="542654"/>
-                </a:lnTo>
-                <a:lnTo>
-                  <a:pt x="380010" y="568725"/>
-                </a:lnTo>
-                <a:lnTo>
-                  <a:pt x="342000" y="592361"/>
-                </a:lnTo>
-                <a:lnTo>
-                  <a:pt x="302525" y="613461"/>
-                </a:lnTo>
-                <a:lnTo>
-                  <a:pt x="261755" y="631934"/>
-                </a:lnTo>
-                <a:lnTo>
-                  <a:pt x="219865" y="647700"/>
-                </a:lnTo>
-                <a:lnTo>
-                  <a:pt x="177032" y="660693"/>
-                </a:lnTo>
-                <a:lnTo>
-                  <a:pt x="133442" y="670857"/>
-                </a:lnTo>
-                <a:lnTo>
-                  <a:pt x="89280" y="678148"/>
-                </a:lnTo>
-                <a:lnTo>
-                  <a:pt x="44736" y="682536"/>
-                </a:lnTo>
-                <a:lnTo>
-                  <a:pt x="0" y="684000"/>
-                </a:lnTo>
-                <a:close/>
-              </a:path>
-            </a:pathLst>
-          </a:custGeom>
-          <a:solidFill>
-            <a:srgbClr val="70E183"/>
-          </a:solidFill>
-          <a:ln>
-            <a:noFill/>
+          </a:prstGeom>
+          <a:ln w="3600">
+            <a:solidFill>
+              <a:srgbClr val="1F402C"/>
+            </a:solidFill>
           </a:ln>
         </p:spPr>
-        <p:txBody>
-          <a:bodyPr rtlCol="0" anchor="ctr"/>
-          <a:lstStyle/>
-          <a:p>
-            <a:pPr algn="ctr"/>
-          </a:p>
-        </p:txBody>
-      </p:sp>
-      <p:sp>
-        <p:nvSpPr>
-          <p:cNvPr id="4" name="텍스트"/>
+      </p:cxnSp>
+      <p:cxnSp>
+        <p:nvCxnSpPr>
+          <p:cNvPr id="4" name="Connector 3"/>
+          <p:cNvCxnSpPr/>
+          <p:nvPr/>
+        </p:nvCxnSpPr>
+        <p:spPr>
+          <a:xfrm>
+            <a:off x="3103200" y="108000"/>
+            <a:ext cx="57600" cy="0"/>
+          </a:xfrm>
+          <a:prstGeom prst="line">
+            <a:avLst/>
+          </a:prstGeom>
+          <a:ln w="3600">
+            <a:solidFill>
+              <a:srgbClr val="1F402C"/>
+            </a:solidFill>
+          </a:ln>
+        </p:spPr>
+      </p:cxnSp>
+      <p:cxnSp>
+        <p:nvCxnSpPr>
+          <p:cNvPr id="5" name="Connector 4"/>
+          <p:cNvCxnSpPr/>
+          <p:nvPr/>
+        </p:nvCxnSpPr>
+        <p:spPr>
+          <a:xfrm>
+            <a:off x="3132000" y="79200"/>
+            <a:ext cx="0" cy="57600"/>
+          </a:xfrm>
+          <a:prstGeom prst="line">
+            <a:avLst/>
+          </a:prstGeom>
+          <a:ln w="3600">
+            <a:solidFill>
+              <a:srgbClr val="1F402C"/>
+            </a:solidFill>
+          </a:ln>
+        </p:spPr>
+      </p:cxnSp>
+      <p:cxnSp>
+        <p:nvCxnSpPr>
+          <p:cNvPr id="6" name="Connector 5"/>
+          <p:cNvCxnSpPr/>
+          <p:nvPr/>
+        </p:nvCxnSpPr>
+        <p:spPr>
+          <a:xfrm>
+            <a:off x="79200" y="1692000"/>
+            <a:ext cx="57600" cy="0"/>
+          </a:xfrm>
+          <a:prstGeom prst="line">
+            <a:avLst/>
+          </a:prstGeom>
+          <a:ln w="3600">
+            <a:solidFill>
+              <a:srgbClr val="1F402C"/>
+            </a:solidFill>
+          </a:ln>
+        </p:spPr>
+      </p:cxnSp>
+      <p:cxnSp>
+        <p:nvCxnSpPr>
+          <p:cNvPr id="7" name="Connector 6"/>
+          <p:cNvCxnSpPr/>
+          <p:nvPr/>
+        </p:nvCxnSpPr>
+        <p:spPr>
+          <a:xfrm>
+            <a:off x="108000" y="1663200"/>
+            <a:ext cx="0" cy="57600"/>
+          </a:xfrm>
+          <a:prstGeom prst="line">
+            <a:avLst/>
+          </a:prstGeom>
+          <a:ln w="3600">
+            <a:solidFill>
+              <a:srgbClr val="1F402C"/>
+            </a:solidFill>
+          </a:ln>
+        </p:spPr>
+      </p:cxnSp>
+      <p:cxnSp>
+        <p:nvCxnSpPr>
+          <p:cNvPr id="8" name="Connector 7"/>
+          <p:cNvCxnSpPr/>
+          <p:nvPr/>
+        </p:nvCxnSpPr>
+        <p:spPr>
+          <a:xfrm>
+            <a:off x="3103200" y="1692000"/>
+            <a:ext cx="57600" cy="0"/>
+          </a:xfrm>
+          <a:prstGeom prst="line">
+            <a:avLst/>
+          </a:prstGeom>
+          <a:ln w="3600">
+            <a:solidFill>
+              <a:srgbClr val="1F402C"/>
+            </a:solidFill>
+          </a:ln>
+        </p:spPr>
+      </p:cxnSp>
+      <p:cxnSp>
+        <p:nvCxnSpPr>
+          <p:cNvPr id="9" name="Connector 8"/>
+          <p:cNvCxnSpPr/>
+          <p:nvPr/>
+        </p:nvCxnSpPr>
+        <p:spPr>
+          <a:xfrm>
+            <a:off x="3132000" y="1663200"/>
+            <a:ext cx="0" cy="57600"/>
+          </a:xfrm>
+          <a:prstGeom prst="line">
+            <a:avLst/>
+          </a:prstGeom>
+          <a:ln w="3600">
+            <a:solidFill>
+              <a:srgbClr val="1F402C"/>
+            </a:solidFill>
+          </a:ln>
+        </p:spPr>
+      </p:cxnSp>
+      <p:sp>
+        <p:nvSpPr>
+          <p:cNvPr id="10" name="텍스트"/>
           <p:cNvSpPr txBox="1"/>
           <p:nvPr/>
         </p:nvSpPr>
         <p:spPr>
           <a:xfrm>
-            <a:off x="1188000" y="1044000"/>
-            <a:ext cx="1800000" cy="432000"/>
+            <a:off x="252000" y="288000"/>
+            <a:ext cx="2520000" cy="123826"/>
           </a:xfrm>
           <a:prstGeom prst="rect">
             <a:avLst/>
@@ -3646,53 +3708,13 @@
           </a:bodyPr>
           <a:lstStyle/>
           <a:p>
-            <a:pPr algn="r">
-              <a:lnSpc>
-                <a:spcPts val="1739"/>
-              </a:lnSpc>
-            </a:pPr>
-            <a:r>
-              <a:rPr sz="1200" b="1">
-                <a:solidFill>
-                  <a:srgbClr val="12151C"/>
-                </a:solidFill>
-                <a:latin typeface="맑은 고딕"/>
-                <a:ea typeface="맑은 고딕"/>
-              </a:rPr>
-              <a:t>한 줄의 응원을 건넵니다</a:t>
-            </a:r>
-          </a:p>
-        </p:txBody>
-      </p:sp>
-      <p:sp>
-        <p:nvSpPr>
-          <p:cNvPr id="5" name="텍스트"/>
-          <p:cNvSpPr txBox="1"/>
-          <p:nvPr/>
-        </p:nvSpPr>
-        <p:spPr>
-          <a:xfrm>
-            <a:off x="1188000" y="1526400"/>
-            <a:ext cx="1800000" cy="123826"/>
-          </a:xfrm>
-          <a:prstGeom prst="rect">
-            <a:avLst/>
-          </a:prstGeom>
-          <a:noFill/>
-        </p:spPr>
-        <p:txBody>
-          <a:bodyPr wrap="square" lIns="0" rIns="0" tIns="0" bIns="0" anchor="t">
-            <a:spAutoFit/>
-          </a:bodyPr>
-          <a:lstStyle/>
-          <a:p>
-            <a:pPr algn="r">
+            <a:pPr algn="ctr">
               <a:lnSpc>
                 <a:spcPts val="942"/>
               </a:lnSpc>
             </a:pPr>
             <a:r>
-              <a:rPr sz="650" b="1" spc="200">
+              <a:rPr sz="650" b="1" spc="220">
                 <a:solidFill>
                   <a:srgbClr val="1F402C"/>
                 </a:solidFill>
@@ -3700,6 +3722,237 @@
                 <a:ea typeface="맑은 고딕"/>
               </a:rPr>
               <a:t>학교 · 학원 이름</a:t>
+            </a:r>
+          </a:p>
+        </p:txBody>
+      </p:sp>
+      <p:sp>
+        <p:nvSpPr>
+          <p:cNvPr id="11" name="Rectangle 10"/>
+          <p:cNvSpPr/>
+          <p:nvPr/>
+        </p:nvSpPr>
+        <p:spPr>
+          <a:xfrm>
+            <a:off x="1530000" y="453600"/>
+            <a:ext cx="180000" cy="14400"/>
+          </a:xfrm>
+          <a:prstGeom prst="rect">
+            <a:avLst/>
+          </a:prstGeom>
+          <a:solidFill>
+            <a:srgbClr val="12151C"/>
+          </a:solidFill>
+          <a:ln>
+            <a:noFill/>
+          </a:ln>
+        </p:spPr>
+        <p:txBody>
+          <a:bodyPr rtlCol="0" anchor="ctr"/>
+          <a:lstStyle/>
+          <a:p>
+            <a:pPr algn="ctr"/>
+          </a:p>
+        </p:txBody>
+      </p:sp>
+      <p:sp>
+        <p:nvSpPr>
+          <p:cNvPr id="12" name="텍스트"/>
+          <p:cNvSpPr txBox="1"/>
+          <p:nvPr/>
+        </p:nvSpPr>
+        <p:spPr>
+          <a:xfrm>
+            <a:off x="360000" y="619200"/>
+            <a:ext cx="2520000" cy="99061"/>
+          </a:xfrm>
+          <a:prstGeom prst="rect">
+            <a:avLst/>
+          </a:prstGeom>
+          <a:noFill/>
+        </p:spPr>
+        <p:txBody>
+          <a:bodyPr wrap="square" lIns="0" rIns="0" tIns="0" bIns="0" anchor="t">
+            <a:spAutoFit/>
+          </a:bodyPr>
+          <a:lstStyle/>
+          <a:p>
+            <a:pPr algn="ctr">
+              <a:lnSpc>
+                <a:spcPts val="754"/>
+              </a:lnSpc>
+            </a:pPr>
+            <a:r>
+              <a:rPr sz="520" b="1" spc="240">
+                <a:solidFill>
+                  <a:srgbClr val="1F402C"/>
+                </a:solidFill>
+                <a:latin typeface="맑은 고딕"/>
+                <a:ea typeface="맑은 고딕"/>
+              </a:rPr>
+              <a:t>수업 안내</a:t>
+            </a:r>
+          </a:p>
+        </p:txBody>
+      </p:sp>
+      <p:sp>
+        <p:nvSpPr>
+          <p:cNvPr id="13" name="텍스트"/>
+          <p:cNvSpPr txBox="1"/>
+          <p:nvPr/>
+        </p:nvSpPr>
+        <p:spPr>
+          <a:xfrm>
+            <a:off x="360000" y="741600"/>
+            <a:ext cx="2520000" cy="396000"/>
+          </a:xfrm>
+          <a:prstGeom prst="rect">
+            <a:avLst/>
+          </a:prstGeom>
+          <a:noFill/>
+        </p:spPr>
+        <p:txBody>
+          <a:bodyPr wrap="square" lIns="0" rIns="0" tIns="0" bIns="0" anchor="t">
+            <a:spAutoFit/>
+          </a:bodyPr>
+          <a:lstStyle/>
+          <a:p>
+            <a:pPr algn="ctr">
+              <a:lnSpc>
+                <a:spcPts val="1188"/>
+              </a:lnSpc>
+            </a:pPr>
+            <a:r>
+              <a:rPr sz="819" b="1">
+                <a:solidFill>
+                  <a:srgbClr val="12151C"/>
+                </a:solidFill>
+                <a:latin typeface="맑은 고딕"/>
+                <a:ea typeface="맑은 고딕"/>
+              </a:rPr>
+              <a:t>국어  ·  과학  ·  코딩  ·  미술</a:t>
+            </a:r>
+          </a:p>
+        </p:txBody>
+      </p:sp>
+      <p:cxnSp>
+        <p:nvCxnSpPr>
+          <p:cNvPr id="14" name="Connector 13"/>
+          <p:cNvCxnSpPr/>
+          <p:nvPr/>
+        </p:nvCxnSpPr>
+        <p:spPr>
+          <a:xfrm>
+            <a:off x="360000" y="1224000"/>
+            <a:ext cx="2520000" cy="0"/>
+          </a:xfrm>
+          <a:prstGeom prst="line">
+            <a:avLst/>
+          </a:prstGeom>
+          <a:ln w="3600">
+            <a:solidFill>
+              <a:srgbClr val="358B47"/>
+            </a:solidFill>
+          </a:ln>
+        </p:spPr>
+      </p:cxnSp>
+      <p:sp>
+        <p:nvSpPr>
+          <p:cNvPr id="15" name="텍스트"/>
+          <p:cNvSpPr txBox="1"/>
+          <p:nvPr/>
+        </p:nvSpPr>
+        <p:spPr>
+          <a:xfrm>
+            <a:off x="360000" y="1317600"/>
+            <a:ext cx="1224000" cy="118111"/>
+          </a:xfrm>
+          <a:prstGeom prst="rect">
+            <a:avLst/>
+          </a:prstGeom>
+          <a:noFill/>
+        </p:spPr>
+        <p:txBody>
+          <a:bodyPr wrap="square" lIns="0" rIns="0" tIns="0" bIns="0" anchor="t">
+            <a:spAutoFit/>
+          </a:bodyPr>
+          <a:lstStyle/>
+          <a:p>
+            <a:pPr algn="ctr">
+              <a:lnSpc>
+                <a:spcPts val="899"/>
+              </a:lnSpc>
+            </a:pPr>
+            <a:r>
+              <a:rPr sz="620" b="0">
+                <a:solidFill>
+                  <a:srgbClr val="12151C"/>
+                </a:solidFill>
+                <a:latin typeface="맑은 고딕"/>
+                <a:ea typeface="맑은 고딕"/>
+              </a:rPr>
+              <a:t>평일 09:00 – 17:00</a:t>
+            </a:r>
+          </a:p>
+        </p:txBody>
+      </p:sp>
+      <p:cxnSp>
+        <p:nvCxnSpPr>
+          <p:cNvPr id="16" name="Connector 15"/>
+          <p:cNvCxnSpPr/>
+          <p:nvPr/>
+        </p:nvCxnSpPr>
+        <p:spPr>
+          <a:xfrm>
+            <a:off x="1620000" y="1296000"/>
+            <a:ext cx="0" cy="180000"/>
+          </a:xfrm>
+          <a:prstGeom prst="line">
+            <a:avLst/>
+          </a:prstGeom>
+          <a:ln w="3600">
+            <a:solidFill>
+              <a:srgbClr val="358B47"/>
+            </a:solidFill>
+          </a:ln>
+        </p:spPr>
+      </p:cxnSp>
+      <p:sp>
+        <p:nvSpPr>
+          <p:cNvPr id="17" name="텍스트"/>
+          <p:cNvSpPr txBox="1"/>
+          <p:nvPr/>
+        </p:nvSpPr>
+        <p:spPr>
+          <a:xfrm>
+            <a:off x="1656000" y="1317600"/>
+            <a:ext cx="1224000" cy="118111"/>
+          </a:xfrm>
+          <a:prstGeom prst="rect">
+            <a:avLst/>
+          </a:prstGeom>
+          <a:noFill/>
+        </p:spPr>
+        <p:txBody>
+          <a:bodyPr wrap="square" lIns="0" rIns="0" tIns="0" bIns="0" anchor="t">
+            <a:spAutoFit/>
+          </a:bodyPr>
+          <a:lstStyle/>
+          <a:p>
+            <a:pPr algn="ctr">
+              <a:lnSpc>
+                <a:spcPts val="899"/>
+              </a:lnSpc>
+            </a:pPr>
+            <a:r>
+              <a:rPr sz="620" b="0">
+                <a:solidFill>
+                  <a:srgbClr val="12151C"/>
+                </a:solidFill>
+                <a:latin typeface="맑은 고딕"/>
+                <a:ea typeface="맑은 고딕"/>
+              </a:rPr>
+              <a:t>www.example.com</a:t>
             </a:r>
           </a:p>
         </p:txBody>
